--- a/slides/0112-Introduction.pptx
+++ b/slides/0112-Introduction.pptx
@@ -5,7 +5,7 @@
     <p:sldMasterId id="2147483648" r:id="rId1"/>
   </p:sldMasterIdLst>
   <p:notesMasterIdLst>
-    <p:notesMasterId r:id="rId22"/>
+    <p:notesMasterId r:id="rId24"/>
   </p:notesMasterIdLst>
   <p:sldIdLst>
     <p:sldId id="256" r:id="rId2"/>
@@ -21,13 +21,15 @@
     <p:sldId id="282" r:id="rId12"/>
     <p:sldId id="283" r:id="rId13"/>
     <p:sldId id="284" r:id="rId14"/>
-    <p:sldId id="286" r:id="rId15"/>
-    <p:sldId id="288" r:id="rId16"/>
-    <p:sldId id="2565" r:id="rId17"/>
-    <p:sldId id="2566" r:id="rId18"/>
-    <p:sldId id="2569" r:id="rId19"/>
-    <p:sldId id="2567" r:id="rId20"/>
-    <p:sldId id="2571" r:id="rId21"/>
+    <p:sldId id="2573" r:id="rId15"/>
+    <p:sldId id="286" r:id="rId16"/>
+    <p:sldId id="288" r:id="rId17"/>
+    <p:sldId id="2565" r:id="rId18"/>
+    <p:sldId id="2566" r:id="rId19"/>
+    <p:sldId id="2569" r:id="rId20"/>
+    <p:sldId id="2567" r:id="rId21"/>
+    <p:sldId id="2571" r:id="rId22"/>
+    <p:sldId id="2572" r:id="rId23"/>
   </p:sldIdLst>
   <p:sldSz cx="24384000" cy="13716000"/>
   <p:notesSz cx="6858000" cy="9144000"/>
@@ -359,6 +361,7 @@
             <p14:sldId id="282"/>
             <p14:sldId id="283"/>
             <p14:sldId id="284"/>
+            <p14:sldId id="2573"/>
           </p14:sldIdLst>
         </p14:section>
         <p14:section name="Linux" id="{7A7F8BD9-915F-F34C-BC43-F174EFB53CC8}">
@@ -370,6 +373,7 @@
             <p14:sldId id="2569"/>
             <p14:sldId id="2567"/>
             <p14:sldId id="2571"/>
+            <p14:sldId id="2572"/>
           </p14:sldIdLst>
         </p14:section>
       </p14:sectionLst>
@@ -630,6 +634,99 @@
 </p:notes>
 </file>
 
+<file path=ppt/notesSlides/notesSlide10.xml><?xml version="1.0" encoding="utf-8"?>
+<p:notes xmlns:a="http://schemas.openxmlformats.org/drawingml/2006/main" xmlns:r="http://schemas.openxmlformats.org/officeDocument/2006/relationships" xmlns:p="http://schemas.openxmlformats.org/presentationml/2006/main">
+  <p:cSld>
+    <p:spTree>
+      <p:nvGrpSpPr>
+        <p:cNvPr id="1" name=""/>
+        <p:cNvGrpSpPr/>
+        <p:nvPr/>
+      </p:nvGrpSpPr>
+      <p:grpSpPr>
+        <a:xfrm>
+          <a:off x="0" y="0"/>
+          <a:ext cx="0" cy="0"/>
+          <a:chOff x="0" y="0"/>
+          <a:chExt cx="0" cy="0"/>
+        </a:xfrm>
+      </p:grpSpPr>
+      <p:sp>
+        <p:nvSpPr>
+          <p:cNvPr id="2" name="Slide Image Placeholder 1"/>
+          <p:cNvSpPr>
+            <a:spLocks noGrp="1" noRot="1" noChangeAspect="1"/>
+          </p:cNvSpPr>
+          <p:nvPr>
+            <p:ph type="sldImg"/>
+          </p:nvPr>
+        </p:nvSpPr>
+        <p:spPr>
+          <a:xfrm>
+            <a:off x="381000" y="685800"/>
+            <a:ext cx="6096000" cy="3429000"/>
+          </a:xfrm>
+        </p:spPr>
+      </p:sp>
+      <p:sp>
+        <p:nvSpPr>
+          <p:cNvPr id="3" name="Notes Placeholder 2"/>
+          <p:cNvSpPr>
+            <a:spLocks noGrp="1"/>
+          </p:cNvSpPr>
+          <p:nvPr>
+            <p:ph type="body" idx="1"/>
+          </p:nvPr>
+        </p:nvSpPr>
+        <p:spPr/>
+        <p:txBody>
+          <a:bodyPr/>
+          <a:lstStyle/>
+          <a:p>
+            <a:r>
+              <a:rPr lang="en-US"/>
+              <a:t>
+Linux permissions determine who can read, write, or execute a file. They are displayed using 'ls -l', which shows attributes like '-rwxr-x---', indicating permissions for the user, group, and others. 'r' stands for read, 'w' for write, and 'x' for execute. To make a script executable, use 'chmod +x script.sh'. Proper permission management ensures security and prevents unauthorized modifications. In HPC environments, permissions also affect collaborative workflows, as shared directories often rely on group-based access. Misconfigured permissions can lead to errors such as 'Permission denied,' so understanding and managing them is crucial for smooth operations.</a:t>
+            </a:r>
+          </a:p>
+        </p:txBody>
+      </p:sp>
+      <p:sp>
+        <p:nvSpPr>
+          <p:cNvPr id="4" name="Slide Number Placeholder 3"/>
+          <p:cNvSpPr>
+            <a:spLocks noGrp="1"/>
+          </p:cNvSpPr>
+          <p:nvPr>
+            <p:ph type="sldNum" sz="quarter" idx="5"/>
+          </p:nvPr>
+        </p:nvSpPr>
+        <p:spPr/>
+        <p:txBody>
+          <a:bodyPr/>
+          <a:lstStyle/>
+          <a:p>
+            <a:fld id="{38EFF46E-6B43-41F9-9272-B566D03A251C}" type="slidenum">
+              <a:rPr lang="en-US" smtClean="0"/>
+              <a:t>20</a:t>
+            </a:fld>
+            <a:endParaRPr lang="en-US"/>
+          </a:p>
+        </p:txBody>
+      </p:sp>
+    </p:spTree>
+    <p:extLst>
+      <p:ext uri="{BB962C8B-B14F-4D97-AF65-F5344CB8AC3E}">
+        <p14:creationId xmlns:p14="http://schemas.microsoft.com/office/powerpoint/2010/main" val="630375835"/>
+      </p:ext>
+    </p:extLst>
+  </p:cSld>
+  <p:clrMapOvr>
+    <a:masterClrMapping/>
+  </p:clrMapOvr>
+</p:notes>
+</file>
+
 <file path=ppt/notesSlides/notesSlide2.xml><?xml version="1.0" encoding="utf-8"?>
 <p:notes xmlns:a="http://schemas.openxmlformats.org/drawingml/2006/main" xmlns:r="http://schemas.openxmlformats.org/officeDocument/2006/relationships" xmlns:p="http://schemas.openxmlformats.org/presentationml/2006/main">
   <p:cSld>
@@ -985,41 +1082,14 @@
           <a:bodyPr/>
           <a:lstStyle/>
           <a:p>
-            <a:r>
-              <a:rPr lang="en-US"/>
-              <a:t>
-The shell, commonly bash on HPC systems, is a command interpreter that reads user input and executes programs. It is the backbone of Linux interaction, enabling navigation, file manipulation, and execution of scripts. Key commands include 'pwd' to print the current directory, 'ls' to list files, and 'cd' to change directories. File operations such as 'mkdir' for creating directories, 'cp' for copying files, 'mv' for moving or renaming, and 'rm' for deletion are fundamental. Beginners should use 'rm -i' to avoid accidental deletions. Advanced shell features include redirection and piping, which allow chaining commands and managing input/output streams efficiently. For help, commands like 'man &lt;command&gt;' or '&lt;command&gt; --help' provide detailed usage instructions. Understanding the shell is critical because batch job scripts, which automate computations on HPC clusters, are essentially shell scripts executed non-interactively.</a:t>
-            </a:r>
-          </a:p>
-        </p:txBody>
-      </p:sp>
-      <p:sp>
-        <p:nvSpPr>
-          <p:cNvPr id="4" name="Slide Number Placeholder 3"/>
-          <p:cNvSpPr>
-            <a:spLocks noGrp="1"/>
-          </p:cNvSpPr>
-          <p:nvPr>
-            <p:ph type="sldNum" sz="quarter" idx="5"/>
-          </p:nvPr>
-        </p:nvSpPr>
-        <p:spPr/>
-        <p:txBody>
-          <a:bodyPr/>
-          <a:lstStyle/>
-          <a:p>
-            <a:fld id="{38EFF46E-6B43-41F9-9272-B566D03A251C}" type="slidenum">
-              <a:rPr lang="en-US" smtClean="0"/>
-              <a:t>16</a:t>
-            </a:fld>
-            <a:endParaRPr lang="en-US"/>
+            <a:endParaRPr lang="en-US" dirty="0"/>
           </a:p>
         </p:txBody>
       </p:sp>
     </p:spTree>
     <p:extLst>
       <p:ext uri="{BB962C8B-B14F-4D97-AF65-F5344CB8AC3E}">
-        <p14:creationId xmlns:p14="http://schemas.microsoft.com/office/powerpoint/2010/main" val="3163126267"/>
+        <p14:creationId xmlns:p14="http://schemas.microsoft.com/office/powerpoint/2010/main" val="1103830960"/>
       </p:ext>
     </p:extLst>
   </p:cSld>
@@ -1081,7 +1151,7 @@
             <a:r>
               <a:rPr lang="en-US"/>
               <a:t>
-Linux organizes storage as a hierarchical directory tree starting at the root '/'. Paths can be absolute, beginning with '/', or relative, starting from the current directory. HPC environments typically provide multiple storage areas: home directories for configuration files, project spaces for collaborative work, and scratch spaces for temporary high-speed storage. Commands like 'df -h' display available disk space, while 'du -sh *' shows the size of items in the current directory. Understanding paths and storage types is essential for efficient data management and avoiding accidental data loss. Permissions also play a role in file accessibility, and users must be aware of where their data resides to optimize performance and comply with storage policies.</a:t>
+The shell, commonly bash on HPC systems, is a command interpreter that reads user input and executes programs. It is the backbone of Linux interaction, enabling navigation, file manipulation, and execution of scripts. Key commands include 'pwd' to print the current directory, 'ls' to list files, and 'cd' to change directories. File operations such as 'mkdir' for creating directories, 'cp' for copying files, 'mv' for moving or renaming, and 'rm' for deletion are fundamental. Beginners should use 'rm -i' to avoid accidental deletions. Advanced shell features include redirection and piping, which allow chaining commands and managing input/output streams efficiently. For help, commands like 'man &lt;command&gt;' or '&lt;command&gt; --help' provide detailed usage instructions. Understanding the shell is critical because batch job scripts, which automate computations on HPC clusters, are essentially shell scripts executed non-interactively.</a:t>
             </a:r>
           </a:p>
         </p:txBody>
@@ -1112,6 +1182,99 @@
     </p:spTree>
     <p:extLst>
       <p:ext uri="{BB962C8B-B14F-4D97-AF65-F5344CB8AC3E}">
+        <p14:creationId xmlns:p14="http://schemas.microsoft.com/office/powerpoint/2010/main" val="3163126267"/>
+      </p:ext>
+    </p:extLst>
+  </p:cSld>
+  <p:clrMapOvr>
+    <a:masterClrMapping/>
+  </p:clrMapOvr>
+</p:notes>
+</file>
+
+<file path=ppt/notesSlides/notesSlide8.xml><?xml version="1.0" encoding="utf-8"?>
+<p:notes xmlns:a="http://schemas.openxmlformats.org/drawingml/2006/main" xmlns:r="http://schemas.openxmlformats.org/officeDocument/2006/relationships" xmlns:p="http://schemas.openxmlformats.org/presentationml/2006/main">
+  <p:cSld>
+    <p:spTree>
+      <p:nvGrpSpPr>
+        <p:cNvPr id="1" name=""/>
+        <p:cNvGrpSpPr/>
+        <p:nvPr/>
+      </p:nvGrpSpPr>
+      <p:grpSpPr>
+        <a:xfrm>
+          <a:off x="0" y="0"/>
+          <a:ext cx="0" cy="0"/>
+          <a:chOff x="0" y="0"/>
+          <a:chExt cx="0" cy="0"/>
+        </a:xfrm>
+      </p:grpSpPr>
+      <p:sp>
+        <p:nvSpPr>
+          <p:cNvPr id="2" name="Slide Image Placeholder 1"/>
+          <p:cNvSpPr>
+            <a:spLocks noGrp="1" noRot="1" noChangeAspect="1"/>
+          </p:cNvSpPr>
+          <p:nvPr>
+            <p:ph type="sldImg"/>
+          </p:nvPr>
+        </p:nvSpPr>
+        <p:spPr>
+          <a:xfrm>
+            <a:off x="381000" y="685800"/>
+            <a:ext cx="6096000" cy="3429000"/>
+          </a:xfrm>
+        </p:spPr>
+      </p:sp>
+      <p:sp>
+        <p:nvSpPr>
+          <p:cNvPr id="3" name="Notes Placeholder 2"/>
+          <p:cNvSpPr>
+            <a:spLocks noGrp="1"/>
+          </p:cNvSpPr>
+          <p:nvPr>
+            <p:ph type="body" idx="1"/>
+          </p:nvPr>
+        </p:nvSpPr>
+        <p:spPr/>
+        <p:txBody>
+          <a:bodyPr/>
+          <a:lstStyle/>
+          <a:p>
+            <a:r>
+              <a:rPr lang="en-US"/>
+              <a:t>
+Linux organizes storage as a hierarchical directory tree starting at the root '/'. Paths can be absolute, beginning with '/', or relative, starting from the current directory. HPC environments typically provide multiple storage areas: home directories for configuration files, project spaces for collaborative work, and scratch spaces for temporary high-speed storage. Commands like 'df -h' display available disk space, while 'du -sh *' shows the size of items in the current directory. Understanding paths and storage types is essential for efficient data management and avoiding accidental data loss. Permissions also play a role in file accessibility, and users must be aware of where their data resides to optimize performance and comply with storage policies.</a:t>
+            </a:r>
+          </a:p>
+        </p:txBody>
+      </p:sp>
+      <p:sp>
+        <p:nvSpPr>
+          <p:cNvPr id="4" name="Slide Number Placeholder 3"/>
+          <p:cNvSpPr>
+            <a:spLocks noGrp="1"/>
+          </p:cNvSpPr>
+          <p:nvPr>
+            <p:ph type="sldNum" sz="quarter" idx="5"/>
+          </p:nvPr>
+        </p:nvSpPr>
+        <p:spPr/>
+        <p:txBody>
+          <a:bodyPr/>
+          <a:lstStyle/>
+          <a:p>
+            <a:fld id="{38EFF46E-6B43-41F9-9272-B566D03A251C}" type="slidenum">
+              <a:rPr lang="en-US" smtClean="0"/>
+              <a:t>18</a:t>
+            </a:fld>
+            <a:endParaRPr lang="en-US"/>
+          </a:p>
+        </p:txBody>
+      </p:sp>
+    </p:spTree>
+    <p:extLst>
+      <p:ext uri="{BB962C8B-B14F-4D97-AF65-F5344CB8AC3E}">
         <p14:creationId xmlns:p14="http://schemas.microsoft.com/office/powerpoint/2010/main" val="1496531129"/>
       </p:ext>
     </p:extLst>
@@ -1122,7 +1285,7 @@
 </p:notes>
 </file>
 
-<file path=ppt/notesSlides/notesSlide8.xml><?xml version="1.0" encoding="utf-8"?>
+<file path=ppt/notesSlides/notesSlide9.xml><?xml version="1.0" encoding="utf-8"?>
 <p:notes xmlns:a="http://schemas.openxmlformats.org/drawingml/2006/main" xmlns:r="http://schemas.openxmlformats.org/officeDocument/2006/relationships" xmlns:p="http://schemas.openxmlformats.org/presentationml/2006/main">
   <p:cSld>
     <p:spTree>
@@ -1172,12 +1335,12 @@
           <a:lstStyle/>
           <a:p>
             <a:r>
-              <a:t>Quick demo: cd ~/chem456/project1; pwd; ls data; cat data/input.csv</a:t>
-            </a:r>
-          </a:p>
-          <a:p>
-            <a:r>
-              <a:t>Tip: Use relative paths inside a project; use absolute paths in scripts that may run from anywhere.</a:t>
+              <a:rPr lang="en-US" dirty="0"/>
+              <a:t>T</a:t>
+            </a:r>
+            <a:r>
+              <a:rPr dirty="0"/>
+              <a:t>ip: Use relative paths inside a project; use absolute paths in scripts that may run from anywhere.</a:t>
             </a:r>
           </a:p>
         </p:txBody>
@@ -1195,99 +1358,6 @@
         <p:spPr/>
       </p:sp>
     </p:spTree>
-  </p:cSld>
-  <p:clrMapOvr>
-    <a:masterClrMapping/>
-  </p:clrMapOvr>
-</p:notes>
-</file>
-
-<file path=ppt/notesSlides/notesSlide9.xml><?xml version="1.0" encoding="utf-8"?>
-<p:notes xmlns:a="http://schemas.openxmlformats.org/drawingml/2006/main" xmlns:r="http://schemas.openxmlformats.org/officeDocument/2006/relationships" xmlns:p="http://schemas.openxmlformats.org/presentationml/2006/main">
-  <p:cSld>
-    <p:spTree>
-      <p:nvGrpSpPr>
-        <p:cNvPr id="1" name=""/>
-        <p:cNvGrpSpPr/>
-        <p:nvPr/>
-      </p:nvGrpSpPr>
-      <p:grpSpPr>
-        <a:xfrm>
-          <a:off x="0" y="0"/>
-          <a:ext cx="0" cy="0"/>
-          <a:chOff x="0" y="0"/>
-          <a:chExt cx="0" cy="0"/>
-        </a:xfrm>
-      </p:grpSpPr>
-      <p:sp>
-        <p:nvSpPr>
-          <p:cNvPr id="2" name="Slide Image Placeholder 1"/>
-          <p:cNvSpPr>
-            <a:spLocks noGrp="1" noRot="1" noChangeAspect="1"/>
-          </p:cNvSpPr>
-          <p:nvPr>
-            <p:ph type="sldImg"/>
-          </p:nvPr>
-        </p:nvSpPr>
-        <p:spPr>
-          <a:xfrm>
-            <a:off x="381000" y="685800"/>
-            <a:ext cx="6096000" cy="3429000"/>
-          </a:xfrm>
-        </p:spPr>
-      </p:sp>
-      <p:sp>
-        <p:nvSpPr>
-          <p:cNvPr id="3" name="Notes Placeholder 2"/>
-          <p:cNvSpPr>
-            <a:spLocks noGrp="1"/>
-          </p:cNvSpPr>
-          <p:nvPr>
-            <p:ph type="body" idx="1"/>
-          </p:nvPr>
-        </p:nvSpPr>
-        <p:spPr/>
-        <p:txBody>
-          <a:bodyPr/>
-          <a:lstStyle/>
-          <a:p>
-            <a:r>
-              <a:rPr lang="en-US"/>
-              <a:t>
-Linux permissions determine who can read, write, or execute a file. They are displayed using 'ls -l', which shows attributes like '-rwxr-x---', indicating permissions for the user, group, and others. 'r' stands for read, 'w' for write, and 'x' for execute. To make a script executable, use 'chmod +x script.sh'. Proper permission management ensures security and prevents unauthorized modifications. In HPC environments, permissions also affect collaborative workflows, as shared directories often rely on group-based access. Misconfigured permissions can lead to errors such as 'Permission denied,' so understanding and managing them is crucial for smooth operations.</a:t>
-            </a:r>
-          </a:p>
-        </p:txBody>
-      </p:sp>
-      <p:sp>
-        <p:nvSpPr>
-          <p:cNvPr id="4" name="Slide Number Placeholder 3"/>
-          <p:cNvSpPr>
-            <a:spLocks noGrp="1"/>
-          </p:cNvSpPr>
-          <p:nvPr>
-            <p:ph type="sldNum" sz="quarter" idx="5"/>
-          </p:nvPr>
-        </p:nvSpPr>
-        <p:spPr/>
-        <p:txBody>
-          <a:bodyPr/>
-          <a:lstStyle/>
-          <a:p>
-            <a:fld id="{38EFF46E-6B43-41F9-9272-B566D03A251C}" type="slidenum">
-              <a:rPr lang="en-US" smtClean="0"/>
-              <a:t>19</a:t>
-            </a:fld>
-            <a:endParaRPr lang="en-US"/>
-          </a:p>
-        </p:txBody>
-      </p:sp>
-    </p:spTree>
-    <p:extLst>
-      <p:ext uri="{BB962C8B-B14F-4D97-AF65-F5344CB8AC3E}">
-        <p14:creationId xmlns:p14="http://schemas.microsoft.com/office/powerpoint/2010/main" val="630375835"/>
-      </p:ext>
-    </p:extLst>
   </p:cSld>
   <p:clrMapOvr>
     <a:masterClrMapping/>
@@ -2145,7 +2215,7 @@
           <a:p>
             <a:fld id="{5BCAD085-E8A6-8845-BD4E-CB4CCA059FC4}" type="datetimeFigureOut">
               <a:rPr lang="en-US" smtClean="0"/>
-              <a:t>1/3/26</a:t>
+              <a:t>1/6/26</a:t>
             </a:fld>
             <a:endParaRPr lang="en-US"/>
           </a:p>
@@ -2404,7 +2474,7 @@
           <a:p>
             <a:fld id="{A7F72289-EB8A-47CA-A283-A769C9E761BF}" type="datetime1">
               <a:rPr lang="en-US" smtClean="0"/>
-              <a:t>1/3/26</a:t>
+              <a:t>1/6/26</a:t>
             </a:fld>
             <a:endParaRPr lang="en-US" dirty="0"/>
           </a:p>
@@ -2735,7 +2805,7 @@
           <a:p>
             <a:fld id="{3CC8FB4D-92F2-4C28-8BFC-2AE0229C3E9A}" type="datetime1">
               <a:rPr lang="en-US" smtClean="0"/>
-              <a:t>1/3/26</a:t>
+              <a:t>1/6/26</a:t>
             </a:fld>
             <a:endParaRPr lang="en-US"/>
           </a:p>
@@ -3009,7 +3079,7 @@
           <a:p>
             <a:fld id="{5BCAD085-E8A6-8845-BD4E-CB4CCA059FC4}" type="datetimeFigureOut">
               <a:rPr lang="en-US" smtClean="0"/>
-              <a:t>1/3/26</a:t>
+              <a:t>1/6/26</a:t>
             </a:fld>
             <a:endParaRPr lang="en-US"/>
           </a:p>
@@ -5322,48 +5392,6 @@
               <a:t>Share something interesting about yourself</a:t>
             </a:r>
           </a:p>
-          <a:p>
-            <a:r>
-              <a:rPr lang="en-US" dirty="0"/>
-              <a:t>Also complete the </a:t>
-            </a:r>
-            <a:r>
-              <a:rPr lang="en-US" dirty="0">
-                <a:hlinkClick r:id="rId3"/>
-              </a:rPr>
-              <a:t>Computational Experience Survey</a:t>
-            </a:r>
-            <a:endParaRPr lang="en-US" dirty="0"/>
-          </a:p>
-          <a:p>
-            <a:pPr lvl="1"/>
-            <a:r>
-              <a:rPr lang="en-US" dirty="0"/>
-              <a:t>How experienced are you with a Linux shell or other command-line interface?</a:t>
-            </a:r>
-          </a:p>
-          <a:p>
-            <a:pPr lvl="1"/>
-            <a:r>
-              <a:rPr lang="en-US" dirty="0"/>
-              <a:t>How experienced are you with python scripting and/or </a:t>
-            </a:r>
-            <a:r>
-              <a:rPr lang="en-US" dirty="0" err="1"/>
-              <a:t>Jupyter</a:t>
-            </a:r>
-            <a:r>
-              <a:rPr lang="en-US" dirty="0"/>
-              <a:t> notebooks?</a:t>
-            </a:r>
-          </a:p>
-          <a:p>
-            <a:pPr lvl="1"/>
-            <a:r>
-              <a:rPr lang="en-US" dirty="0"/>
-              <a:t>What operating system do you use (e.g. Windows/Mac/Linux) and browser?</a:t>
-            </a:r>
-          </a:p>
         </p:txBody>
       </p:sp>
       <p:sp>
@@ -7224,6 +7252,161 @@
   <p:cSld>
     <p:spTree>
       <p:nvGrpSpPr>
+        <p:cNvPr id="1" name=""/>
+        <p:cNvGrpSpPr/>
+        <p:nvPr/>
+      </p:nvGrpSpPr>
+      <p:grpSpPr>
+        <a:xfrm>
+          <a:off x="0" y="0"/>
+          <a:ext cx="0" cy="0"/>
+          <a:chOff x="0" y="0"/>
+          <a:chExt cx="0" cy="0"/>
+        </a:xfrm>
+      </p:grpSpPr>
+      <p:sp>
+        <p:nvSpPr>
+          <p:cNvPr id="2" name="Title 1">
+            <a:extLst>
+              <a:ext uri="{FF2B5EF4-FFF2-40B4-BE49-F238E27FC236}">
+                <a16:creationId xmlns:a16="http://schemas.microsoft.com/office/drawing/2014/main" id="{47553A5A-FFBB-487A-CE3D-3B60CA404C48}"/>
+              </a:ext>
+            </a:extLst>
+          </p:cNvPr>
+          <p:cNvSpPr>
+            <a:spLocks noGrp="1"/>
+          </p:cNvSpPr>
+          <p:nvPr>
+            <p:ph type="title"/>
+          </p:nvPr>
+        </p:nvSpPr>
+        <p:spPr/>
+        <p:txBody>
+          <a:bodyPr/>
+          <a:lstStyle/>
+          <a:p>
+            <a:r>
+              <a:rPr lang="en-US" dirty="0"/>
+              <a:t>ACCESS Allocations</a:t>
+            </a:r>
+          </a:p>
+        </p:txBody>
+      </p:sp>
+      <p:sp>
+        <p:nvSpPr>
+          <p:cNvPr id="3" name="Text Placeholder 2">
+            <a:extLst>
+              <a:ext uri="{FF2B5EF4-FFF2-40B4-BE49-F238E27FC236}">
+                <a16:creationId xmlns:a16="http://schemas.microsoft.com/office/drawing/2014/main" id="{84BCA214-3EC1-AD7A-44A5-E5CEADDD3491}"/>
+              </a:ext>
+            </a:extLst>
+          </p:cNvPr>
+          <p:cNvSpPr>
+            <a:spLocks noGrp="1"/>
+          </p:cNvSpPr>
+          <p:nvPr>
+            <p:ph type="body" idx="1"/>
+          </p:nvPr>
+        </p:nvSpPr>
+        <p:spPr>
+          <a:xfrm>
+            <a:off x="635000" y="2540000"/>
+            <a:ext cx="11232745" cy="10160000"/>
+          </a:xfrm>
+        </p:spPr>
+        <p:txBody>
+          <a:bodyPr>
+            <a:normAutofit/>
+          </a:bodyPr>
+          <a:lstStyle/>
+          <a:p>
+            <a:r>
+              <a:rPr lang="en-US" dirty="0"/>
+              <a:t>System for distributing ACCESS computing resources</a:t>
+            </a:r>
+          </a:p>
+          <a:p>
+            <a:r>
+              <a:rPr lang="en-US" dirty="0"/>
+              <a:t>Class (not individual students) has one allocation </a:t>
+            </a:r>
+          </a:p>
+          <a:p>
+            <a:r>
+              <a:rPr lang="en-US" dirty="0"/>
+              <a:t>Graduate students / PhD scientists can be PIs on additional ACCESS allocations</a:t>
+            </a:r>
+          </a:p>
+          <a:p>
+            <a:r>
+              <a:rPr lang="en-US" dirty="0"/>
+              <a:t>Allocation in ACCESS Credits that can be exchanged for resources, mostly CPU, GPU, and Storage </a:t>
+            </a:r>
+          </a:p>
+          <a:p>
+            <a:r>
+              <a:rPr lang="en-US" dirty="0"/>
+              <a:t>c.f. </a:t>
+            </a:r>
+            <a:r>
+              <a:rPr lang="en-US" dirty="0">
+                <a:hlinkClick r:id="rId3"/>
+              </a:rPr>
+              <a:t>https://allocations.access-ci.org/</a:t>
+            </a:r>
+            <a:endParaRPr lang="en-US" dirty="0"/>
+          </a:p>
+        </p:txBody>
+      </p:sp>
+      <p:pic>
+        <p:nvPicPr>
+          <p:cNvPr id="4" name="Picture 3">
+            <a:extLst>
+              <a:ext uri="{FF2B5EF4-FFF2-40B4-BE49-F238E27FC236}">
+                <a16:creationId xmlns:a16="http://schemas.microsoft.com/office/drawing/2014/main" id="{D6575354-188C-D01B-0E7E-FEACDC254B8D}"/>
+              </a:ext>
+            </a:extLst>
+          </p:cNvPr>
+          <p:cNvPicPr>
+            <a:picLocks noChangeAspect="1"/>
+          </p:cNvPicPr>
+          <p:nvPr/>
+        </p:nvPicPr>
+        <p:blipFill>
+          <a:blip r:embed="rId4"/>
+          <a:stretch>
+            <a:fillRect/>
+          </a:stretch>
+        </p:blipFill>
+        <p:spPr>
+          <a:xfrm>
+            <a:off x="12192000" y="4422572"/>
+            <a:ext cx="11007582" cy="4870855"/>
+          </a:xfrm>
+          <a:prstGeom prst="rect">
+            <a:avLst/>
+          </a:prstGeom>
+        </p:spPr>
+      </p:pic>
+    </p:spTree>
+    <p:extLst>
+      <p:ext uri="{BB962C8B-B14F-4D97-AF65-F5344CB8AC3E}">
+        <p14:creationId xmlns:p14="http://schemas.microsoft.com/office/powerpoint/2010/main" val="3649337497"/>
+      </p:ext>
+    </p:extLst>
+  </p:cSld>
+  <p:clrMapOvr>
+    <a:masterClrMapping/>
+  </p:clrMapOvr>
+  <p:transition spd="med"/>
+</p:sld>
+</file>
+
+<file path=ppt/slides/slide15.xml><?xml version="1.0" encoding="utf-8"?>
+<p:sld xmlns:a="http://schemas.openxmlformats.org/drawingml/2006/main" xmlns:r="http://schemas.openxmlformats.org/officeDocument/2006/relationships" xmlns:p="http://schemas.openxmlformats.org/presentationml/2006/main">
+  <p:cSld>
+    <p:spTree>
+      <p:nvGrpSpPr>
         <p:cNvPr id="1" name="">
           <a:extLst>
             <a:ext uri="{FF2B5EF4-FFF2-40B4-BE49-F238E27FC236}">
@@ -7289,7 +7472,7 @@
 </p:sld>
 </file>
 
-<file path=ppt/slides/slide15.xml><?xml version="1.0" encoding="utf-8"?>
+<file path=ppt/slides/slide16.xml><?xml version="1.0" encoding="utf-8"?>
 <p:sld xmlns:a="http://schemas.openxmlformats.org/drawingml/2006/main" xmlns:r="http://schemas.openxmlformats.org/officeDocument/2006/relationships" xmlns:p="http://schemas.openxmlformats.org/presentationml/2006/main">
   <p:cSld>
     <p:spTree>
@@ -7449,6 +7632,9 @@
                     <p:cTn id="3" fill="hold">
                       <p:stCondLst>
                         <p:cond delay="indefinite"/>
+                        <p:cond evt="onBegin" delay="0">
+                          <p:tn val="2"/>
+                        </p:cond>
                       </p:stCondLst>
                       <p:childTnLst>
                         <p:par>
@@ -7458,7 +7644,7 @@
                             </p:stCondLst>
                             <p:childTnLst>
                               <p:par>
-                                <p:cTn id="5" presetID="1" presetClass="entr" presetSubtype="0" fill="hold" grpId="0" nodeType="clickEffect">
+                                <p:cTn id="5" presetID="1" presetClass="entr" presetSubtype="0" fill="hold" grpId="0" nodeType="withEffect">
                                   <p:stCondLst>
                                     <p:cond delay="0"/>
                                   </p:stCondLst>
@@ -7860,13 +8046,13 @@
       </p:par>
     </p:tnLst>
     <p:bldLst>
-      <p:bldP spid="3" grpId="0" build="p" animBg="1"/>
+      <p:bldP spid="3" grpId="0" uiExpand="1" build="p" animBg="1"/>
     </p:bldLst>
   </p:timing>
 </p:sld>
 </file>
 
-<file path=ppt/slides/slide16.xml><?xml version="1.0" encoding="utf-8"?>
+<file path=ppt/slides/slide17.xml><?xml version="1.0" encoding="utf-8"?>
 <p:sld xmlns:a="http://schemas.openxmlformats.org/drawingml/2006/main" xmlns:r="http://schemas.openxmlformats.org/officeDocument/2006/relationships" xmlns:p="http://schemas.openxmlformats.org/presentationml/2006/main">
   <p:cSld>
     <p:spTree>
@@ -8125,7 +8311,7 @@
 </p:sld>
 </file>
 
-<file path=ppt/slides/slide17.xml><?xml version="1.0" encoding="utf-8"?>
+<file path=ppt/slides/slide18.xml><?xml version="1.0" encoding="utf-8"?>
 <p:sld xmlns:a="http://schemas.openxmlformats.org/drawingml/2006/main" xmlns:r="http://schemas.openxmlformats.org/officeDocument/2006/relationships" xmlns:p="http://schemas.openxmlformats.org/presentationml/2006/main">
   <p:cSld>
     <p:spTree>
@@ -8360,18 +8546,18 @@
   <p:clrMapOvr>
     <a:masterClrMapping/>
   </p:clrMapOvr>
-  <mc:AlternateContent xmlns:mc="http://schemas.openxmlformats.org/markup-compatibility/2006">
-    <mc:Choice xmlns:p14="http://schemas.microsoft.com/office/powerpoint/2010/main" Requires="p14">
+  <mc:AlternateContent xmlns:mc="http://schemas.openxmlformats.org/markup-compatibility/2006" xmlns:p14="http://schemas.microsoft.com/office/powerpoint/2010/main">
+    <mc:Choice Requires="p14">
       <p:transition p14:dur="0" advClick="0"/>
     </mc:Choice>
-    <mc:Fallback>
+    <mc:Fallback xmlns="">
       <p:transition advClick="0"/>
     </mc:Fallback>
   </mc:AlternateContent>
 </p:sld>
 </file>
 
-<file path=ppt/slides/slide18.xml><?xml version="1.0" encoding="utf-8"?>
+<file path=ppt/slides/slide19.xml><?xml version="1.0" encoding="utf-8"?>
 <p:sld xmlns:a="http://schemas.openxmlformats.org/drawingml/2006/main" xmlns:r="http://schemas.openxmlformats.org/officeDocument/2006/relationships" xmlns:p="http://schemas.openxmlformats.org/presentationml/2006/main">
   <p:cSld>
     <p:spTree>
@@ -8432,7 +8618,9 @@
           </a:xfrm>
         </p:spPr>
         <p:txBody>
-          <a:bodyPr wrap="square"/>
+          <a:bodyPr wrap="square">
+            <a:normAutofit fontScale="92500"/>
+          </a:bodyPr>
           <a:lstStyle/>
           <a:p>
             <a:pPr marL="0" indent="0">
@@ -8470,6 +8658,12 @@
             <a:r>
               <a:rPr lang="en-US" dirty="0"/>
               <a:t>Analogy: an exact street address</a:t>
+            </a:r>
+          </a:p>
+          <a:p>
+            <a:r>
+              <a:rPr lang="en-US" dirty="0"/>
+              <a:t>Shortcut: ~/ is your home directory</a:t>
             </a:r>
           </a:p>
         </p:txBody>
@@ -8491,7 +8685,9 @@
           </a:xfrm>
         </p:spPr>
         <p:txBody>
-          <a:bodyPr wrap="square"/>
+          <a:bodyPr wrap="square">
+            <a:normAutofit fontScale="92500"/>
+          </a:bodyPr>
           <a:lstStyle/>
           <a:p>
             <a:pPr marL="0" indent="0">
@@ -8542,227 +8738,15 @@
               <a:t>Analogy: “across the street from Pritzker Science Center”</a:t>
             </a:r>
           </a:p>
+          <a:p>
+            <a:r>
+              <a:rPr lang="en-US" dirty="0"/>
+              <a:t>Shortcut: ../ is the parent directory</a:t>
+            </a:r>
+          </a:p>
         </p:txBody>
       </p:sp>
     </p:spTree>
-  </p:cSld>
-  <p:clrMapOvr>
-    <a:masterClrMapping/>
-  </p:clrMapOvr>
-</p:sld>
-</file>
-
-<file path=ppt/slides/slide19.xml><?xml version="1.0" encoding="utf-8"?>
-<p:sld xmlns:a="http://schemas.openxmlformats.org/drawingml/2006/main" xmlns:r="http://schemas.openxmlformats.org/officeDocument/2006/relationships" xmlns:p="http://schemas.openxmlformats.org/presentationml/2006/main">
-  <p:cSld>
-    <p:spTree>
-      <p:nvGrpSpPr>
-        <p:cNvPr id="1" name=""/>
-        <p:cNvGrpSpPr/>
-        <p:nvPr/>
-      </p:nvGrpSpPr>
-      <p:grpSpPr>
-        <a:xfrm>
-          <a:off x="0" y="0"/>
-          <a:ext cx="0" cy="0"/>
-          <a:chOff x="0" y="0"/>
-          <a:chExt cx="0" cy="0"/>
-        </a:xfrm>
-      </p:grpSpPr>
-      <p:sp>
-        <p:nvSpPr>
-          <p:cNvPr id="2" name="Title 1">
-            <a:extLst>
-              <a:ext uri="{FF2B5EF4-FFF2-40B4-BE49-F238E27FC236}">
-                <a16:creationId xmlns:a16="http://schemas.microsoft.com/office/drawing/2014/main" id="{A9C450EC-251C-178E-6753-3F19B31A2F0C}"/>
-              </a:ext>
-            </a:extLst>
-          </p:cNvPr>
-          <p:cNvSpPr>
-            <a:spLocks noGrp="1"/>
-          </p:cNvSpPr>
-          <p:nvPr>
-            <p:ph type="title"/>
-          </p:nvPr>
-        </p:nvSpPr>
-        <p:spPr>
-          <a:xfrm>
-            <a:off x="1219199" y="1371600"/>
-            <a:ext cx="9129526" cy="2853596"/>
-          </a:xfrm>
-        </p:spPr>
-        <p:txBody>
-          <a:bodyPr anchor="b">
-            <a:normAutofit/>
-          </a:bodyPr>
-          <a:lstStyle/>
-          <a:p>
-            <a:r>
-              <a:rPr lang="en-US"/>
-              <a:t>Permissions</a:t>
-            </a:r>
-          </a:p>
-        </p:txBody>
-      </p:sp>
-      <p:pic>
-        <p:nvPicPr>
-          <p:cNvPr id="5" name="Content Placeholder 4" descr="&quot;Set of icons for organisation.  Includes documents, search icons, folders, etc  Hi Res raster file.Note that all images are my own design.&quot;">
-            <a:extLst>
-              <a:ext uri="{FF2B5EF4-FFF2-40B4-BE49-F238E27FC236}">
-                <a16:creationId xmlns:a16="http://schemas.microsoft.com/office/drawing/2014/main" id="{2A988007-AB4A-42DA-B66C-D9BCF902B46A}"/>
-              </a:ext>
-            </a:extLst>
-          </p:cNvPr>
-          <p:cNvPicPr>
-            <a:picLocks noGrp="1" noChangeAspect="1"/>
-          </p:cNvPicPr>
-          <p:nvPr>
-            <p:ph type="pic" sz="quarter" idx="15"/>
-          </p:nvPr>
-        </p:nvPicPr>
-        <p:blipFill>
-          <a:blip r:embed="rId3"/>
-          <a:srcRect t="348" r="1" b="19986"/>
-          <a:stretch>
-            <a:fillRect/>
-          </a:stretch>
-        </p:blipFill>
-        <p:spPr>
-          <a:xfrm>
-            <a:off x="1219199" y="5029200"/>
-            <a:ext cx="9129526" cy="7273196"/>
-          </a:xfrm>
-        </p:spPr>
-      </p:pic>
-      <p:sp>
-        <p:nvSpPr>
-          <p:cNvPr id="4" name="Content Placeholder 3">
-            <a:extLst>
-              <a:ext uri="{FF2B5EF4-FFF2-40B4-BE49-F238E27FC236}">
-                <a16:creationId xmlns:a16="http://schemas.microsoft.com/office/drawing/2014/main" id="{BEB0BC29-23AA-34BE-0CE3-3E35B3F01478}"/>
-              </a:ext>
-            </a:extLst>
-          </p:cNvPr>
-          <p:cNvSpPr>
-            <a:spLocks noGrp="1"/>
-          </p:cNvSpPr>
-          <p:nvPr>
-            <p:ph sz="quarter" idx="14"/>
-            <p:extLst>
-              <p:ext uri="{E7BDC344-281C-4309-B0C6-D0EE65EED2A8}">
-                <p202:designPr xmlns:p202="http://schemas.microsoft.com/office/powerpoint/2020/02/main">
-                  <p202:designTagLst>
-                    <p202:designTag name="ARCH:1:CLS" val="InformationBlock"/>
-                    <p202:designTag name="ARCH:1:VSVAR" val="TitledTextBox"/>
-                  </p202:designTagLst>
-                </p202:designPr>
-              </p:ext>
-            </p:extLst>
-          </p:nvPr>
-        </p:nvSpPr>
-        <p:spPr>
-          <a:xfrm>
-            <a:off x="11580121" y="1371600"/>
-            <a:ext cx="11584682" cy="10930796"/>
-          </a:xfrm>
-        </p:spPr>
-        <p:txBody>
-          <a:bodyPr>
-            <a:normAutofit/>
-          </a:bodyPr>
-          <a:lstStyle/>
-          <a:p>
-            <a:pPr marL="0" indent="0">
-              <a:spcBef>
-                <a:spcPts val="5000"/>
-              </a:spcBef>
-              <a:buNone/>
-            </a:pPr>
-            <a:r>
-              <a:rPr lang="en-US" b="1"/>
-              <a:t>Linux File Permissions</a:t>
-            </a:r>
-          </a:p>
-          <a:p>
-            <a:pPr marL="0" lvl="1" indent="0">
-              <a:buNone/>
-            </a:pPr>
-            <a:r>
-              <a:t>Permissions indicate who can read, write, or execute files, shown as symbols like '-rwxr-x---'.</a:t>
-            </a:r>
-            <a:endParaRPr lang="en-US"/>
-          </a:p>
-          <a:p>
-            <a:pPr marL="0" indent="0">
-              <a:spcBef>
-                <a:spcPts val="5000"/>
-              </a:spcBef>
-              <a:buNone/>
-            </a:pPr>
-            <a:r>
-              <a:rPr lang="en-US" b="1"/>
-              <a:t>Permission Modification</a:t>
-            </a:r>
-          </a:p>
-          <a:p>
-            <a:pPr marL="0" lvl="1" indent="0">
-              <a:buNone/>
-            </a:pPr>
-            <a:r>
-              <a:t>Use commands like 'chmod +x script.sh' to change file permissions and make scripts executable.</a:t>
-            </a:r>
-            <a:endParaRPr lang="en-US"/>
-          </a:p>
-          <a:p>
-            <a:pPr marL="0" indent="0">
-              <a:spcBef>
-                <a:spcPts val="5000"/>
-              </a:spcBef>
-              <a:buNone/>
-            </a:pPr>
-            <a:r>
-              <a:rPr lang="en-US" b="1"/>
-              <a:t>Security and Collaboration</a:t>
-            </a:r>
-          </a:p>
-          <a:p>
-            <a:pPr marL="0" lvl="1" indent="0">
-              <a:buNone/>
-            </a:pPr>
-            <a:r>
-              <a:t>Proper permission management prevents unauthorized access and supports group-based collaboration in HPC environments.</a:t>
-            </a:r>
-            <a:endParaRPr lang="en-US"/>
-          </a:p>
-          <a:p>
-            <a:pPr marL="0" indent="0">
-              <a:spcBef>
-                <a:spcPts val="5000"/>
-              </a:spcBef>
-              <a:buNone/>
-            </a:pPr>
-            <a:r>
-              <a:rPr lang="en-US" b="1"/>
-              <a:t>Common Permission Errors</a:t>
-            </a:r>
-          </a:p>
-          <a:p>
-            <a:pPr marL="0" lvl="1" indent="0">
-              <a:buNone/>
-            </a:pPr>
-            <a:r>
-              <a:t>Misconfigured permissions can cause errors like 'Permission denied,' disrupting workflows and operations.</a:t>
-            </a:r>
-            <a:endParaRPr lang="en-US"/>
-          </a:p>
-        </p:txBody>
-      </p:sp>
-    </p:spTree>
-    <p:extLst>
-      <p:ext uri="{BB962C8B-B14F-4D97-AF65-F5344CB8AC3E}">
-        <p14:creationId xmlns:p14="http://schemas.microsoft.com/office/powerpoint/2010/main" val="1904730799"/>
-      </p:ext>
-    </p:extLst>
   </p:cSld>
   <p:clrMapOvr>
     <a:masterClrMapping/>
@@ -9291,6 +9275,224 @@
   <p:cSld>
     <p:spTree>
       <p:nvGrpSpPr>
+        <p:cNvPr id="1" name=""/>
+        <p:cNvGrpSpPr/>
+        <p:nvPr/>
+      </p:nvGrpSpPr>
+      <p:grpSpPr>
+        <a:xfrm>
+          <a:off x="0" y="0"/>
+          <a:ext cx="0" cy="0"/>
+          <a:chOff x="0" y="0"/>
+          <a:chExt cx="0" cy="0"/>
+        </a:xfrm>
+      </p:grpSpPr>
+      <p:sp>
+        <p:nvSpPr>
+          <p:cNvPr id="2" name="Title 1">
+            <a:extLst>
+              <a:ext uri="{FF2B5EF4-FFF2-40B4-BE49-F238E27FC236}">
+                <a16:creationId xmlns:a16="http://schemas.microsoft.com/office/drawing/2014/main" id="{A9C450EC-251C-178E-6753-3F19B31A2F0C}"/>
+              </a:ext>
+            </a:extLst>
+          </p:cNvPr>
+          <p:cNvSpPr>
+            <a:spLocks noGrp="1"/>
+          </p:cNvSpPr>
+          <p:nvPr>
+            <p:ph type="title"/>
+          </p:nvPr>
+        </p:nvSpPr>
+        <p:spPr>
+          <a:xfrm>
+            <a:off x="1219199" y="1371600"/>
+            <a:ext cx="9129526" cy="2853596"/>
+          </a:xfrm>
+        </p:spPr>
+        <p:txBody>
+          <a:bodyPr anchor="b">
+            <a:normAutofit/>
+          </a:bodyPr>
+          <a:lstStyle/>
+          <a:p>
+            <a:r>
+              <a:rPr lang="en-US"/>
+              <a:t>Permissions</a:t>
+            </a:r>
+          </a:p>
+        </p:txBody>
+      </p:sp>
+      <p:pic>
+        <p:nvPicPr>
+          <p:cNvPr id="5" name="Content Placeholder 4" descr="&quot;Set of icons for organisation.  Includes documents, search icons, folders, etc  Hi Res raster file.Note that all images are my own design.&quot;">
+            <a:extLst>
+              <a:ext uri="{FF2B5EF4-FFF2-40B4-BE49-F238E27FC236}">
+                <a16:creationId xmlns:a16="http://schemas.microsoft.com/office/drawing/2014/main" id="{2A988007-AB4A-42DA-B66C-D9BCF902B46A}"/>
+              </a:ext>
+            </a:extLst>
+          </p:cNvPr>
+          <p:cNvPicPr>
+            <a:picLocks noGrp="1" noChangeAspect="1"/>
+          </p:cNvPicPr>
+          <p:nvPr>
+            <p:ph type="pic" sz="quarter" idx="15"/>
+          </p:nvPr>
+        </p:nvPicPr>
+        <p:blipFill>
+          <a:blip r:embed="rId3"/>
+          <a:srcRect t="348" r="1" b="19986"/>
+          <a:stretch>
+            <a:fillRect/>
+          </a:stretch>
+        </p:blipFill>
+        <p:spPr>
+          <a:xfrm>
+            <a:off x="1219199" y="5029200"/>
+            <a:ext cx="9129526" cy="7273196"/>
+          </a:xfrm>
+        </p:spPr>
+      </p:pic>
+      <p:sp>
+        <p:nvSpPr>
+          <p:cNvPr id="4" name="Content Placeholder 3">
+            <a:extLst>
+              <a:ext uri="{FF2B5EF4-FFF2-40B4-BE49-F238E27FC236}">
+                <a16:creationId xmlns:a16="http://schemas.microsoft.com/office/drawing/2014/main" id="{BEB0BC29-23AA-34BE-0CE3-3E35B3F01478}"/>
+              </a:ext>
+            </a:extLst>
+          </p:cNvPr>
+          <p:cNvSpPr>
+            <a:spLocks noGrp="1"/>
+          </p:cNvSpPr>
+          <p:nvPr>
+            <p:ph sz="quarter" idx="14"/>
+            <p:extLst>
+              <p:ext uri="{E7BDC344-281C-4309-B0C6-D0EE65EED2A8}">
+                <p202:designPr xmlns:p202="http://schemas.microsoft.com/office/powerpoint/2020/02/main">
+                  <p202:designTagLst>
+                    <p202:designTag name="ARCH:1:CLS" val="InformationBlock"/>
+                    <p202:designTag name="ARCH:1:VSVAR" val="TitledTextBox"/>
+                  </p202:designTagLst>
+                </p202:designPr>
+              </p:ext>
+            </p:extLst>
+          </p:nvPr>
+        </p:nvSpPr>
+        <p:spPr>
+          <a:xfrm>
+            <a:off x="11580121" y="1371600"/>
+            <a:ext cx="11584682" cy="10930796"/>
+          </a:xfrm>
+        </p:spPr>
+        <p:txBody>
+          <a:bodyPr>
+            <a:normAutofit/>
+          </a:bodyPr>
+          <a:lstStyle/>
+          <a:p>
+            <a:pPr marL="0" indent="0">
+              <a:spcBef>
+                <a:spcPts val="5000"/>
+              </a:spcBef>
+              <a:buNone/>
+            </a:pPr>
+            <a:r>
+              <a:rPr lang="en-US" b="1"/>
+              <a:t>Linux File Permissions</a:t>
+            </a:r>
+          </a:p>
+          <a:p>
+            <a:pPr marL="0" lvl="1" indent="0">
+              <a:buNone/>
+            </a:pPr>
+            <a:r>
+              <a:t>Permissions indicate who can read, write, or execute files, shown as symbols like '-rwxr-x---'.</a:t>
+            </a:r>
+            <a:endParaRPr lang="en-US"/>
+          </a:p>
+          <a:p>
+            <a:pPr marL="0" indent="0">
+              <a:spcBef>
+                <a:spcPts val="5000"/>
+              </a:spcBef>
+              <a:buNone/>
+            </a:pPr>
+            <a:r>
+              <a:rPr lang="en-US" b="1"/>
+              <a:t>Permission Modification</a:t>
+            </a:r>
+          </a:p>
+          <a:p>
+            <a:pPr marL="0" lvl="1" indent="0">
+              <a:buNone/>
+            </a:pPr>
+            <a:r>
+              <a:t>Use commands like 'chmod +x script.sh' to change file permissions and make scripts executable.</a:t>
+            </a:r>
+            <a:endParaRPr lang="en-US"/>
+          </a:p>
+          <a:p>
+            <a:pPr marL="0" indent="0">
+              <a:spcBef>
+                <a:spcPts val="5000"/>
+              </a:spcBef>
+              <a:buNone/>
+            </a:pPr>
+            <a:r>
+              <a:rPr lang="en-US" b="1"/>
+              <a:t>Security and Collaboration</a:t>
+            </a:r>
+          </a:p>
+          <a:p>
+            <a:pPr marL="0" lvl="1" indent="0">
+              <a:buNone/>
+            </a:pPr>
+            <a:r>
+              <a:t>Proper permission management prevents unauthorized access and supports group-based collaboration in HPC environments.</a:t>
+            </a:r>
+            <a:endParaRPr lang="en-US"/>
+          </a:p>
+          <a:p>
+            <a:pPr marL="0" indent="0">
+              <a:spcBef>
+                <a:spcPts val="5000"/>
+              </a:spcBef>
+              <a:buNone/>
+            </a:pPr>
+            <a:r>
+              <a:rPr lang="en-US" b="1"/>
+              <a:t>Common Permission Errors</a:t>
+            </a:r>
+          </a:p>
+          <a:p>
+            <a:pPr marL="0" lvl="1" indent="0">
+              <a:buNone/>
+            </a:pPr>
+            <a:r>
+              <a:t>Misconfigured permissions can cause errors like 'Permission denied,' disrupting workflows and operations.</a:t>
+            </a:r>
+            <a:endParaRPr lang="en-US"/>
+          </a:p>
+        </p:txBody>
+      </p:sp>
+    </p:spTree>
+    <p:extLst>
+      <p:ext uri="{BB962C8B-B14F-4D97-AF65-F5344CB8AC3E}">
+        <p14:creationId xmlns:p14="http://schemas.microsoft.com/office/powerpoint/2010/main" val="1904730799"/>
+      </p:ext>
+    </p:extLst>
+  </p:cSld>
+  <p:clrMapOvr>
+    <a:masterClrMapping/>
+  </p:clrMapOvr>
+</p:sld>
+</file>
+
+<file path=ppt/slides/slide21.xml><?xml version="1.0" encoding="utf-8"?>
+<p:sld xmlns:a="http://schemas.openxmlformats.org/drawingml/2006/main" xmlns:r="http://schemas.openxmlformats.org/officeDocument/2006/relationships" xmlns:p="http://schemas.openxmlformats.org/presentationml/2006/main">
+  <p:cSld>
+    <p:spTree>
+      <p:nvGrpSpPr>
         <p:cNvPr id="1" name="">
           <a:extLst>
             <a:ext uri="{FF2B5EF4-FFF2-40B4-BE49-F238E27FC236}">
@@ -9351,6 +9553,141 @@
     <p:extLst>
       <p:ext uri="{BB962C8B-B14F-4D97-AF65-F5344CB8AC3E}">
         <p14:creationId xmlns:p14="http://schemas.microsoft.com/office/powerpoint/2010/main" val="4151815335"/>
+      </p:ext>
+    </p:extLst>
+  </p:cSld>
+  <p:clrMapOvr>
+    <a:masterClrMapping/>
+  </p:clrMapOvr>
+  <p:transition spd="med"/>
+</p:sld>
+</file>
+
+<file path=ppt/slides/slide22.xml><?xml version="1.0" encoding="utf-8"?>
+<p:sld xmlns:a="http://schemas.openxmlformats.org/drawingml/2006/main" xmlns:r="http://schemas.openxmlformats.org/officeDocument/2006/relationships" xmlns:p="http://schemas.openxmlformats.org/presentationml/2006/main">
+  <p:cSld>
+    <p:spTree>
+      <p:nvGrpSpPr>
+        <p:cNvPr id="1" name=""/>
+        <p:cNvGrpSpPr/>
+        <p:nvPr/>
+      </p:nvGrpSpPr>
+      <p:grpSpPr>
+        <a:xfrm>
+          <a:off x="0" y="0"/>
+          <a:ext cx="0" cy="0"/>
+          <a:chOff x="0" y="0"/>
+          <a:chExt cx="0" cy="0"/>
+        </a:xfrm>
+      </p:grpSpPr>
+      <p:sp>
+        <p:nvSpPr>
+          <p:cNvPr id="3" name="Title 2">
+            <a:extLst>
+              <a:ext uri="{FF2B5EF4-FFF2-40B4-BE49-F238E27FC236}">
+                <a16:creationId xmlns:a16="http://schemas.microsoft.com/office/drawing/2014/main" id="{05A7FF8B-32EC-9A29-AF04-E188E8E87EEA}"/>
+              </a:ext>
+            </a:extLst>
+          </p:cNvPr>
+          <p:cNvSpPr>
+            <a:spLocks noGrp="1"/>
+          </p:cNvSpPr>
+          <p:nvPr>
+            <p:ph type="title"/>
+          </p:nvPr>
+        </p:nvSpPr>
+        <p:spPr/>
+        <p:txBody>
+          <a:bodyPr/>
+          <a:lstStyle/>
+          <a:p>
+            <a:r>
+              <a:rPr lang="en-US" dirty="0"/>
+              <a:t>Homework</a:t>
+            </a:r>
+          </a:p>
+        </p:txBody>
+      </p:sp>
+      <p:sp>
+        <p:nvSpPr>
+          <p:cNvPr id="4" name="Text Placeholder 3">
+            <a:extLst>
+              <a:ext uri="{FF2B5EF4-FFF2-40B4-BE49-F238E27FC236}">
+                <a16:creationId xmlns:a16="http://schemas.microsoft.com/office/drawing/2014/main" id="{0ACA14E1-2D6A-E85A-5BC5-9A93B0DF690E}"/>
+              </a:ext>
+            </a:extLst>
+          </p:cNvPr>
+          <p:cNvSpPr>
+            <a:spLocks noGrp="1"/>
+          </p:cNvSpPr>
+          <p:nvPr>
+            <p:ph type="body" idx="1"/>
+          </p:nvPr>
+        </p:nvSpPr>
+        <p:spPr/>
+        <p:txBody>
+          <a:bodyPr/>
+          <a:lstStyle/>
+          <a:p>
+            <a:r>
+              <a:rPr lang="en-US" dirty="0"/>
+              <a:t>By Tuesday 1/13 at noon, </a:t>
+            </a:r>
+            <a:r>
+              <a:rPr lang="en-US" u="sng" dirty="0">
+                <a:hlinkClick r:id="rId2"/>
+              </a:rPr>
+              <a:t>sign up for an ACCESS account</a:t>
+            </a:r>
+            <a:r>
+              <a:rPr lang="en-US" dirty="0"/>
+              <a:t> and </a:t>
+            </a:r>
+            <a:r>
+              <a:rPr lang="en-US" dirty="0">
+                <a:hlinkClick r:id="rId3"/>
+              </a:rPr>
+              <a:t>submit your username</a:t>
+            </a:r>
+            <a:r>
+              <a:rPr lang="en-US" dirty="0"/>
+              <a:t> on Canvas. This will give ACCESS and I time to add you to the class allocation by Wednesday’s class.</a:t>
+            </a:r>
+          </a:p>
+          <a:p>
+            <a:r>
+              <a:rPr lang="en-US" dirty="0"/>
+              <a:t>By Wednesday 1/14 at 8:30am, fill out </a:t>
+            </a:r>
+            <a:r>
+              <a:rPr lang="en-US" dirty="0">
+                <a:hlinkClick r:id="rId4"/>
+              </a:rPr>
+              <a:t>Meet Your Classmates</a:t>
+            </a:r>
+            <a:r>
+              <a:rPr lang="en-US" dirty="0"/>
+              <a:t> on Canvas. This counts as two participation points.</a:t>
+            </a:r>
+          </a:p>
+          <a:p>
+            <a:r>
+              <a:rPr lang="en-US" dirty="0"/>
+              <a:t>By next Wednesday 1/21 at 8:30am, complete Exercise 0.</a:t>
+            </a:r>
+          </a:p>
+          <a:p>
+            <a:r>
+              <a:rPr lang="en-US" dirty="0"/>
+              <a:t>By next Friday 1/21 at 8:30am, complete Exercise 1.</a:t>
+            </a:r>
+          </a:p>
+        </p:txBody>
+      </p:sp>
+    </p:spTree>
+    <p:extLst>
+      <p:ext uri="{BB962C8B-B14F-4D97-AF65-F5344CB8AC3E}">
+        <p14:creationId xmlns:p14="http://schemas.microsoft.com/office/powerpoint/2010/main" val="2613052161"/>
       </p:ext>
     </p:extLst>
   </p:cSld>
@@ -13401,13 +13738,7 @@
               <a:rPr lang="en-US" dirty="0">
                 <a:hlinkClick r:id="rId12"/>
               </a:rPr>
-              <a:t>ACCESS-C</a:t>
-            </a:r>
-            <a:r>
-              <a:rPr lang="en-US" dirty="0">
-                <a:hlinkClick r:id="rId12"/>
-              </a:rPr>
-              <a:t>I</a:t>
+              <a:t>ACCESS-CI</a:t>
             </a:r>
             <a:r>
               <a:rPr lang="en-US" dirty="0"/>

--- a/slides/0112-Introduction.pptx
+++ b/slides/0112-Introduction.pptx
@@ -2215,7 +2215,7 @@
           <a:p>
             <a:fld id="{5BCAD085-E8A6-8845-BD4E-CB4CCA059FC4}" type="datetimeFigureOut">
               <a:rPr lang="en-US" smtClean="0"/>
-              <a:t>1/6/26</a:t>
+              <a:t>1/7/26</a:t>
             </a:fld>
             <a:endParaRPr lang="en-US"/>
           </a:p>
@@ -2474,7 +2474,7 @@
           <a:p>
             <a:fld id="{A7F72289-EB8A-47CA-A283-A769C9E761BF}" type="datetime1">
               <a:rPr lang="en-US" smtClean="0"/>
-              <a:t>1/6/26</a:t>
+              <a:t>1/7/26</a:t>
             </a:fld>
             <a:endParaRPr lang="en-US" dirty="0"/>
           </a:p>
@@ -2805,7 +2805,7 @@
           <a:p>
             <a:fld id="{3CC8FB4D-92F2-4C28-8BFC-2AE0229C3E9A}" type="datetime1">
               <a:rPr lang="en-US" smtClean="0"/>
-              <a:t>1/6/26</a:t>
+              <a:t>1/7/26</a:t>
             </a:fld>
             <a:endParaRPr lang="en-US"/>
           </a:p>
@@ -3079,7 +3079,7 @@
           <a:p>
             <a:fld id="{5BCAD085-E8A6-8845-BD4E-CB4CCA059FC4}" type="datetimeFigureOut">
               <a:rPr lang="en-US" smtClean="0"/>
-              <a:t>1/6/26</a:t>
+              <a:t>1/7/26</a:t>
             </a:fld>
             <a:endParaRPr lang="en-US"/>
           </a:p>
@@ -4268,7 +4268,7 @@
           </a:ln>
           <a:extLst>
             <a:ext uri="{C572A759-6A51-4108-AA02-DFA0A04FC94B}">
-              <ma14:wrappingTextBoxFlag xmlns="" xmlns:m="http://schemas.openxmlformats.org/officeDocument/2006/math" xmlns:a14="http://schemas.microsoft.com/office/drawing/2010/main" xmlns:ma14="http://schemas.microsoft.com/office/mac/drawingml/2011/main" val="1"/>
+              <ma14:wrappingTextBoxFlag xmlns:ma14="http://schemas.microsoft.com/office/mac/drawingml/2011/main" xmlns:a14="http://schemas.microsoft.com/office/drawing/2010/main" xmlns:m="http://schemas.openxmlformats.org/officeDocument/2006/math" xmlns="" val="1"/>
             </a:ext>
           </a:extLst>
         </p:spPr>
@@ -4307,7 +4307,7 @@
           </a:ln>
           <a:extLst>
             <a:ext uri="{C572A759-6A51-4108-AA02-DFA0A04FC94B}">
-              <ma14:wrappingTextBoxFlag xmlns="" xmlns:m="http://schemas.openxmlformats.org/officeDocument/2006/math" xmlns:a14="http://schemas.microsoft.com/office/drawing/2010/main" xmlns:ma14="http://schemas.microsoft.com/office/mac/drawingml/2011/main" val="1"/>
+              <ma14:wrappingTextBoxFlag xmlns:ma14="http://schemas.microsoft.com/office/mac/drawingml/2011/main" xmlns:a14="http://schemas.microsoft.com/office/drawing/2010/main" xmlns:m="http://schemas.openxmlformats.org/officeDocument/2006/math" xmlns="" val="1"/>
             </a:ext>
           </a:extLst>
         </p:spPr>
@@ -5233,7 +5233,7 @@
             <a:pPr lvl="1"/>
             <a:r>
               <a:rPr lang="en-US" dirty="0"/>
-              <a:t>Student (by next class)</a:t>
+              <a:t>Yourself (by 1/21)</a:t>
             </a:r>
           </a:p>
           <a:p>
@@ -5344,13 +5344,13 @@
           <a:p>
             <a:r>
               <a:rPr lang="en-US" dirty="0"/>
-              <a:t>Before the next class, fill out </a:t>
+              <a:t>Before class on 1/21, fill out this survey under </a:t>
             </a:r>
             <a:r>
               <a:rPr lang="en-US" dirty="0">
                 <a:hlinkClick r:id="rId2"/>
               </a:rPr>
-              <a:t>Meet Your Classmates</a:t>
+              <a:t>Participation</a:t>
             </a:r>
             <a:r>
               <a:rPr lang="en-US" dirty="0"/>
@@ -5414,7 +5414,7 @@
           </a:prstGeom>
           <a:extLst>
             <a:ext uri="{C572A759-6A51-4108-AA02-DFA0A04FC94B}">
-              <ma14:wrappingTextBoxFlag xmlns="" xmlns:m="http://schemas.openxmlformats.org/officeDocument/2006/math" xmlns:a14="http://schemas.microsoft.com/office/drawing/2010/main" xmlns:ma14="http://schemas.microsoft.com/office/mac/drawingml/2011/main" val="1"/>
+              <ma14:wrappingTextBoxFlag xmlns:ma14="http://schemas.microsoft.com/office/mac/drawingml/2011/main" xmlns:a14="http://schemas.microsoft.com/office/drawing/2010/main" xmlns:m="http://schemas.openxmlformats.org/officeDocument/2006/math" xmlns="" val="1"/>
             </a:ext>
           </a:extLst>
         </p:spPr>
@@ -9657,13 +9657,13 @@
           <a:p>
             <a:r>
               <a:rPr lang="en-US" dirty="0"/>
-              <a:t>By Wednesday 1/14 at 8:30am, fill out </a:t>
+              <a:t>By next Wednesday 1/21 at 8:30am, fill out the Introduce Yourself survey under </a:t>
             </a:r>
             <a:r>
               <a:rPr lang="en-US" dirty="0">
                 <a:hlinkClick r:id="rId4"/>
               </a:rPr>
-              <a:t>Meet Your Classmates</a:t>
+              <a:t>Participation</a:t>
             </a:r>
             <a:r>
               <a:rPr lang="en-US" dirty="0"/>
@@ -14730,7 +14730,7 @@
           </a:prstGeom>
           <a:extLst>
             <a:ext uri="{C572A759-6A51-4108-AA02-DFA0A04FC94B}">
-              <ma14:wrappingTextBoxFlag xmlns="" xmlns:m="http://schemas.openxmlformats.org/officeDocument/2006/math" xmlns:a14="http://schemas.microsoft.com/office/drawing/2010/main" xmlns:ma14="http://schemas.microsoft.com/office/mac/drawingml/2011/main" val="1"/>
+              <ma14:wrappingTextBoxFlag xmlns:ma14="http://schemas.microsoft.com/office/mac/drawingml/2011/main" xmlns:a14="http://schemas.microsoft.com/office/drawing/2010/main" xmlns:m="http://schemas.openxmlformats.org/officeDocument/2006/math" xmlns="" val="1"/>
             </a:ext>
           </a:extLst>
         </p:spPr>
@@ -14765,7 +14765,7 @@
           </a:ln>
           <a:extLst>
             <a:ext uri="{C572A759-6A51-4108-AA02-DFA0A04FC94B}">
-              <ma14:wrappingTextBoxFlag xmlns="" xmlns:m="http://schemas.openxmlformats.org/officeDocument/2006/math" xmlns:a14="http://schemas.microsoft.com/office/drawing/2010/main" xmlns:ma14="http://schemas.microsoft.com/office/mac/drawingml/2011/main" val="1"/>
+              <ma14:wrappingTextBoxFlag xmlns:ma14="http://schemas.microsoft.com/office/mac/drawingml/2011/main" xmlns:a14="http://schemas.microsoft.com/office/drawing/2010/main" xmlns:m="http://schemas.openxmlformats.org/officeDocument/2006/math" xmlns="" val="1"/>
             </a:ext>
           </a:extLst>
         </p:spPr>
@@ -15444,7 +15444,7 @@
           </a:prstGeom>
           <a:extLst>
             <a:ext uri="{C572A759-6A51-4108-AA02-DFA0A04FC94B}">
-              <ma14:wrappingTextBoxFlag xmlns="" xmlns:m="http://schemas.openxmlformats.org/officeDocument/2006/math" xmlns:a14="http://schemas.microsoft.com/office/drawing/2010/main" xmlns:ma14="http://schemas.microsoft.com/office/mac/drawingml/2011/main" val="1"/>
+              <ma14:wrappingTextBoxFlag xmlns:ma14="http://schemas.microsoft.com/office/mac/drawingml/2011/main" xmlns:a14="http://schemas.microsoft.com/office/drawing/2010/main" xmlns:m="http://schemas.openxmlformats.org/officeDocument/2006/math" xmlns="" val="1"/>
             </a:ext>
           </a:extLst>
         </p:spPr>

--- a/slides/0112-Introduction.pptx
+++ b/slides/0112-Introduction.pptx
@@ -2215,7 +2215,7 @@
           <a:p>
             <a:fld id="{5BCAD085-E8A6-8845-BD4E-CB4CCA059FC4}" type="datetimeFigureOut">
               <a:rPr lang="en-US" smtClean="0"/>
-              <a:t>1/7/26</a:t>
+              <a:t>1/13/26</a:t>
             </a:fld>
             <a:endParaRPr lang="en-US"/>
           </a:p>
@@ -2474,7 +2474,7 @@
           <a:p>
             <a:fld id="{A7F72289-EB8A-47CA-A283-A769C9E761BF}" type="datetime1">
               <a:rPr lang="en-US" smtClean="0"/>
-              <a:t>1/7/26</a:t>
+              <a:t>1/13/26</a:t>
             </a:fld>
             <a:endParaRPr lang="en-US" dirty="0"/>
           </a:p>
@@ -2805,7 +2805,7 @@
           <a:p>
             <a:fld id="{3CC8FB4D-92F2-4C28-8BFC-2AE0229C3E9A}" type="datetime1">
               <a:rPr lang="en-US" smtClean="0"/>
-              <a:t>1/7/26</a:t>
+              <a:t>1/13/26</a:t>
             </a:fld>
             <a:endParaRPr lang="en-US"/>
           </a:p>
@@ -3079,7 +3079,7 @@
           <a:p>
             <a:fld id="{5BCAD085-E8A6-8845-BD4E-CB4CCA059FC4}" type="datetimeFigureOut">
               <a:rPr lang="en-US" smtClean="0"/>
-              <a:t>1/7/26</a:t>
+              <a:t>1/13/26</a:t>
             </a:fld>
             <a:endParaRPr lang="en-US"/>
           </a:p>
@@ -4268,7 +4268,7 @@
           </a:ln>
           <a:extLst>
             <a:ext uri="{C572A759-6A51-4108-AA02-DFA0A04FC94B}">
-              <ma14:wrappingTextBoxFlag xmlns:ma14="http://schemas.microsoft.com/office/mac/drawingml/2011/main" xmlns:a14="http://schemas.microsoft.com/office/drawing/2010/main" xmlns:m="http://schemas.openxmlformats.org/officeDocument/2006/math" xmlns="" val="1"/>
+              <ma14:wrappingTextBoxFlag xmlns="" xmlns:m="http://schemas.openxmlformats.org/officeDocument/2006/math" xmlns:a14="http://schemas.microsoft.com/office/drawing/2010/main" xmlns:ma14="http://schemas.microsoft.com/office/mac/drawingml/2011/main" val="1"/>
             </a:ext>
           </a:extLst>
         </p:spPr>
@@ -4307,7 +4307,7 @@
           </a:ln>
           <a:extLst>
             <a:ext uri="{C572A759-6A51-4108-AA02-DFA0A04FC94B}">
-              <ma14:wrappingTextBoxFlag xmlns:ma14="http://schemas.microsoft.com/office/mac/drawingml/2011/main" xmlns:a14="http://schemas.microsoft.com/office/drawing/2010/main" xmlns:m="http://schemas.openxmlformats.org/officeDocument/2006/math" xmlns="" val="1"/>
+              <ma14:wrappingTextBoxFlag xmlns="" xmlns:m="http://schemas.openxmlformats.org/officeDocument/2006/math" xmlns:a14="http://schemas.microsoft.com/office/drawing/2010/main" xmlns:ma14="http://schemas.microsoft.com/office/mac/drawingml/2011/main" val="1"/>
             </a:ext>
           </a:extLst>
         </p:spPr>
@@ -5414,7 +5414,7 @@
           </a:prstGeom>
           <a:extLst>
             <a:ext uri="{C572A759-6A51-4108-AA02-DFA0A04FC94B}">
-              <ma14:wrappingTextBoxFlag xmlns:ma14="http://schemas.microsoft.com/office/mac/drawingml/2011/main" xmlns:a14="http://schemas.microsoft.com/office/drawing/2010/main" xmlns:m="http://schemas.openxmlformats.org/officeDocument/2006/math" xmlns="" val="1"/>
+              <ma14:wrappingTextBoxFlag xmlns="" xmlns:m="http://schemas.openxmlformats.org/officeDocument/2006/math" xmlns:a14="http://schemas.microsoft.com/office/drawing/2010/main" xmlns:ma14="http://schemas.microsoft.com/office/mac/drawingml/2011/main" val="1"/>
             </a:ext>
           </a:extLst>
         </p:spPr>
@@ -9657,7 +9657,19 @@
           <a:p>
             <a:r>
               <a:rPr lang="en-US" dirty="0"/>
-              <a:t>By next Wednesday 1/21 at 8:30am, fill out the Introduce Yourself survey under </a:t>
+              <a:t>By next Wednesday 1/21 </a:t>
+            </a:r>
+            <a:r>
+              <a:rPr lang="en-US"/>
+              <a:t>at 8:30am,</a:t>
+            </a:r>
+            <a:endParaRPr lang="en-US" dirty="0"/>
+          </a:p>
+          <a:p>
+            <a:pPr lvl="1"/>
+            <a:r>
+              <a:rPr lang="en-US" dirty="0"/>
+              <a:t>Fill out the Introduce Yourself survey under </a:t>
             </a:r>
             <a:r>
               <a:rPr lang="en-US" dirty="0">
@@ -9671,15 +9683,16 @@
             </a:r>
           </a:p>
           <a:p>
+            <a:pPr lvl="1"/>
             <a:r>
               <a:rPr lang="en-US" dirty="0"/>
-              <a:t>By next Wednesday 1/21 at 8:30am, complete Exercise 0.</a:t>
+              <a:t>Complete Exercise 0.</a:t>
             </a:r>
           </a:p>
           <a:p>
             <a:r>
               <a:rPr lang="en-US" dirty="0"/>
-              <a:t>By next Friday 1/21 at 8:30am, complete Exercise 1.</a:t>
+              <a:t>By next Friday 1/23 at 8:30am, complete Exercise 1.</a:t>
             </a:r>
           </a:p>
         </p:txBody>
@@ -14730,7 +14743,7 @@
           </a:prstGeom>
           <a:extLst>
             <a:ext uri="{C572A759-6A51-4108-AA02-DFA0A04FC94B}">
-              <ma14:wrappingTextBoxFlag xmlns:ma14="http://schemas.microsoft.com/office/mac/drawingml/2011/main" xmlns:a14="http://schemas.microsoft.com/office/drawing/2010/main" xmlns:m="http://schemas.openxmlformats.org/officeDocument/2006/math" xmlns="" val="1"/>
+              <ma14:wrappingTextBoxFlag xmlns="" xmlns:m="http://schemas.openxmlformats.org/officeDocument/2006/math" xmlns:a14="http://schemas.microsoft.com/office/drawing/2010/main" xmlns:ma14="http://schemas.microsoft.com/office/mac/drawingml/2011/main" val="1"/>
             </a:ext>
           </a:extLst>
         </p:spPr>
@@ -14765,7 +14778,7 @@
           </a:ln>
           <a:extLst>
             <a:ext uri="{C572A759-6A51-4108-AA02-DFA0A04FC94B}">
-              <ma14:wrappingTextBoxFlag xmlns:ma14="http://schemas.microsoft.com/office/mac/drawingml/2011/main" xmlns:a14="http://schemas.microsoft.com/office/drawing/2010/main" xmlns:m="http://schemas.openxmlformats.org/officeDocument/2006/math" xmlns="" val="1"/>
+              <ma14:wrappingTextBoxFlag xmlns="" xmlns:m="http://schemas.openxmlformats.org/officeDocument/2006/math" xmlns:a14="http://schemas.microsoft.com/office/drawing/2010/main" xmlns:ma14="http://schemas.microsoft.com/office/mac/drawingml/2011/main" val="1"/>
             </a:ext>
           </a:extLst>
         </p:spPr>
@@ -15444,7 +15457,7 @@
           </a:prstGeom>
           <a:extLst>
             <a:ext uri="{C572A759-6A51-4108-AA02-DFA0A04FC94B}">
-              <ma14:wrappingTextBoxFlag xmlns:ma14="http://schemas.microsoft.com/office/mac/drawingml/2011/main" xmlns:a14="http://schemas.microsoft.com/office/drawing/2010/main" xmlns:m="http://schemas.openxmlformats.org/officeDocument/2006/math" xmlns="" val="1"/>
+              <ma14:wrappingTextBoxFlag xmlns="" xmlns:m="http://schemas.openxmlformats.org/officeDocument/2006/math" xmlns:a14="http://schemas.microsoft.com/office/drawing/2010/main" xmlns:ma14="http://schemas.microsoft.com/office/mac/drawingml/2011/main" val="1"/>
             </a:ext>
           </a:extLst>
         </p:spPr>
